--- a/dist/초4/사회·역사/경제와참여/초4_사회·역사_경제와참여_02_교환과교류.pptx
+++ b/dist/초4/사회·역사/경제와참여/초4_사회·역사_경제와참여_02_교환과교류.pptx
@@ -122,13 +122,13 @@
   <p:extLst>
     <p:ext uri="{521415D9-36F7-43E2-AB2F-B90AF26B5E84}">
       <p14:sectionLst xmlns:p14="http://schemas.microsoft.com/office/powerpoint/2010/main">
-        <p14:section name="도입" id="{19a5537f-865e-6cab-9af9-51965ef79ca1}">
+        <p14:section name="도입" id="{78b972f7-01b8-1619-8a17-8ad5abcfa4bc}">
           <p14:sldIdLst>
             <p14:sldId id="256"/>
             <p14:sldId id="257"/>
           </p14:sldIdLst>
         </p14:section>
-        <p14:section name="개념" id="{bf4e85da-55d0-177c-da37-48f73e110931}">
+        <p14:section name="개념" id="{14138cac-fdd3-a510-1632-8452d90de052}">
           <p14:sldIdLst>
             <p14:sldId id="258"/>
             <p14:sldId id="260"/>
@@ -137,7 +137,7 @@
             <p14:sldId id="267"/>
           </p14:sldIdLst>
         </p14:section>
-        <p14:section name="연습" id="{aa9ea523-c2dc-2935-bd71-38f7ca62fbfc}">
+        <p14:section name="연습" id="{7d1ecb8f-addb-807a-91d8-52fa9f8285f3}">
           <p14:sldIdLst>
             <p14:sldId id="259"/>
             <p14:sldId id="261"/>
@@ -145,40 +145,40 @@
             <p14:sldId id="268"/>
           </p14:sldIdLst>
         </p14:section>
-        <p14:section name="개념" id="{35b22e3e-44b2-ab29-52dc-3befc6caafa1}">
+        <p14:section name="개념" id="{addf1856-ba5d-dc68-073e-14895388f00b}">
           <p14:sldIdLst/>
         </p14:section>
-        <p14:section name="연습" id="{4f05cd62-8941-4149-995e-9fbb76a7b265}">
+        <p14:section name="연습" id="{31515f03-f6d1-e24d-cd65-e06a4bf2dfff}">
           <p14:sldIdLst/>
         </p14:section>
-        <p14:section name="개념" id="{391404db-515d-84a8-c526-9db5c1d2e943}">
+        <p14:section name="개념" id="{f43f716a-7c4c-3557-40b9-9a0beef59af4}">
           <p14:sldIdLst/>
         </p14:section>
-        <p14:section name="연습" id="{0d4c2de5-a261-be60-7efd-f4be00f6f905}">
+        <p14:section name="연습" id="{d056b1a5-89a1-e12a-d6e7-5c62d89bd3f5}">
           <p14:sldIdLst/>
         </p14:section>
-        <p14:section name="확인" id="{270b6665-2e9d-3bef-7a77-a6625f880483}">
+        <p14:section name="확인" id="{f1ecf12e-3042-9fa9-a25f-693c2638629e}">
           <p14:sldIdLst>
             <p14:sldId id="265"/>
             <p14:sldId id="266"/>
             <p14:sldId id="269"/>
           </p14:sldIdLst>
         </p14:section>
-        <p14:section name="개념" id="{1333996d-4fcc-aaf1-90ba-39d54afa8132}">
+        <p14:section name="개념" id="{46c6e514-deeb-e613-078c-006a90306fb9}">
           <p14:sldIdLst/>
         </p14:section>
-        <p14:section name="연습" id="{0d8a46b8-8f89-fe7e-0d9c-a685aac54649}">
+        <p14:section name="연습" id="{05396846-37c2-400c-ab2e-2fab0e5231ee}">
           <p14:sldIdLst/>
         </p14:section>
-        <p14:section name="확인" id="{6b1e59cc-c17d-2b0d-48fd-14b06637a6ca}">
+        <p14:section name="확인" id="{02929361-0671-4947-a61c-40fd40a1cf87}">
           <p14:sldIdLst/>
         </p14:section>
-        <p14:section name="정리" id="{5e995c70-6af2-1e2f-be4a-da1589d858cf}">
+        <p14:section name="정리" id="{eb5efc54-b468-fa64-d2f6-f17533747acc}">
           <p14:sldIdLst>
             <p14:sldId id="270"/>
           </p14:sldIdLst>
         </p14:section>
-        <p14:section name="보충" id="{fc344127-69f8-ee44-b8b2-edc266b0c481}">
+        <p14:section name="보충" id="{3ccabc55-ebfc-abc2-ffc1-720f33fa7d5b}">
           <p14:sldIdLst>
             <p14:sldId id="271"/>
           </p14:sldIdLst>
